--- a/m7/diapositivos/sessao-05-m7-f14.pptx
+++ b/m7/diapositivos/sessao-05-m7-f14.pptx
@@ -868,7 +868,7 @@
                 <a:ea typeface="Arial" pitchFamily="34" charset="-122"/>
                 <a:cs typeface="Arial" pitchFamily="34" charset="-120"/>
               </a:rPr>
-              <a:t>Lição M7-F14, Não sei se é sonho, se realidade</a:t>
+              <a:t>Lição M7-F14, «Não sei se é sonho, se realidade»</a:t>
             </a:r>
             <a:endParaRPr lang="en-US" sz="1000" dirty="0"/>
           </a:p>
@@ -1026,7 +1026,7 @@
                 <a:ea typeface="Arial" pitchFamily="34" charset="-122"/>
                 <a:cs typeface="Arial" pitchFamily="34" charset="-120"/>
               </a:rPr>
-              <a:t>Não sei se é sonho, se realidade</a:t>
+              <a:t>«Não sei se é sonho, se realidade»</a:t>
             </a:r>
             <a:endParaRPr lang="en-US" sz="3400" dirty="0"/>
           </a:p>
@@ -1396,7 +1396,7 @@
                 <a:ea typeface="Arial" pitchFamily="34" charset="-122"/>
                 <a:cs typeface="Arial" pitchFamily="34" charset="-120"/>
               </a:rPr>
-              <a:t>Lição M7-F14, Não sei se é sonho, se realidade</a:t>
+              <a:t>Lição M7-F14, «Não sei se é sonho, se realidade»</a:t>
             </a:r>
             <a:endParaRPr lang="en-US" sz="1000" dirty="0"/>
           </a:p>
@@ -2109,7 +2109,7 @@
                 <a:ea typeface="Arial" pitchFamily="34" charset="-122"/>
                 <a:cs typeface="Arial" pitchFamily="34" charset="-120"/>
               </a:rPr>
-              <a:t>Lição M7-F14, Não sei se é sonho, se realidade</a:t>
+              <a:t>Lição M7-F14, «Não sei se é sonho, se realidade»</a:t>
             </a:r>
             <a:endParaRPr lang="en-US" sz="1000" dirty="0"/>
           </a:p>
@@ -2388,7 +2388,7 @@
                 <a:ea typeface="Arial" pitchFamily="34" charset="-122"/>
                 <a:cs typeface="Arial" pitchFamily="34" charset="-120"/>
               </a:rPr>
-              <a:t>Lição M7-F14, Não sei se é sonho, se realidade</a:t>
+              <a:t>Lição M7-F14, «Não sei se é sonho, se realidade»</a:t>
             </a:r>
             <a:endParaRPr lang="en-US" sz="1000" dirty="0"/>
           </a:p>
@@ -2838,7 +2838,35 @@
                 <a:ea typeface="Arial" pitchFamily="34" charset="-122"/>
                 <a:cs typeface="Arial" pitchFamily="34" charset="-120"/>
               </a:rPr>
-              <a:t>Fernando Pessoa (20-8-1933), Poesias, Ática, 1942, Arquivo Pessoa</a:t>
+              <a:t>Fernando Pessoa (20-8-1933), </a:t>
+            </a:r>
+            <a:pPr indent="0" marL="0">
+              <a:buNone/>
+            </a:pPr>
+            <a:r>
+              <a:rPr lang="en-US" sz="1200" i="1" dirty="0">
+                <a:solidFill>
+                  <a:srgbClr val="A9A79F"/>
+                </a:solidFill>
+                <a:latin typeface="Arial" pitchFamily="34" charset="0"/>
+                <a:ea typeface="Arial" pitchFamily="34" charset="-122"/>
+                <a:cs typeface="Arial" pitchFamily="34" charset="-120"/>
+              </a:rPr>
+              <a:t>Poesias</a:t>
+            </a:r>
+            <a:pPr indent="0" marL="0">
+              <a:buNone/>
+            </a:pPr>
+            <a:r>
+              <a:rPr lang="en-US" sz="1200" dirty="0">
+                <a:solidFill>
+                  <a:srgbClr val="A9A79F"/>
+                </a:solidFill>
+                <a:latin typeface="Arial" pitchFamily="34" charset="0"/>
+                <a:ea typeface="Arial" pitchFamily="34" charset="-122"/>
+                <a:cs typeface="Arial" pitchFamily="34" charset="-120"/>
+              </a:rPr>
+              <a:t>, Ática, 1942, Arquivo Pessoa</a:t>
             </a:r>
             <a:endParaRPr lang="en-US" sz="1200" dirty="0"/>
           </a:p>
@@ -2948,7 +2976,7 @@
                 <a:ea typeface="Arial" pitchFamily="34" charset="-122"/>
                 <a:cs typeface="Arial" pitchFamily="34" charset="-120"/>
               </a:rPr>
-              <a:t>Lição M7-F14, Não sei se é sonho, se realidade</a:t>
+              <a:t>Lição M7-F14, «Não sei se é sonho, se realidade»</a:t>
             </a:r>
             <a:endParaRPr lang="en-US" sz="1000" dirty="0"/>
           </a:p>
@@ -3402,7 +3430,35 @@
                 <a:ea typeface="Arial" pitchFamily="34" charset="-122"/>
                 <a:cs typeface="Arial" pitchFamily="34" charset="-120"/>
               </a:rPr>
-              <a:t>Fernando Pessoa (20-8-1933), Poesias, Ática, 1942, Arquivo Pessoa</a:t>
+              <a:t>Fernando Pessoa (20-8-1933), </a:t>
+            </a:r>
+            <a:pPr indent="0" marL="0">
+              <a:buNone/>
+            </a:pPr>
+            <a:r>
+              <a:rPr lang="en-US" sz="1200" i="1" dirty="0">
+                <a:solidFill>
+                  <a:srgbClr val="A9A79F"/>
+                </a:solidFill>
+                <a:latin typeface="Arial" pitchFamily="34" charset="0"/>
+                <a:ea typeface="Arial" pitchFamily="34" charset="-122"/>
+                <a:cs typeface="Arial" pitchFamily="34" charset="-120"/>
+              </a:rPr>
+              <a:t>Poesias</a:t>
+            </a:r>
+            <a:pPr indent="0" marL="0">
+              <a:buNone/>
+            </a:pPr>
+            <a:r>
+              <a:rPr lang="en-US" sz="1200" dirty="0">
+                <a:solidFill>
+                  <a:srgbClr val="A9A79F"/>
+                </a:solidFill>
+                <a:latin typeface="Arial" pitchFamily="34" charset="0"/>
+                <a:ea typeface="Arial" pitchFamily="34" charset="-122"/>
+                <a:cs typeface="Arial" pitchFamily="34" charset="-120"/>
+              </a:rPr>
+              <a:t>, Ática, 1942, Arquivo Pessoa</a:t>
             </a:r>
             <a:endParaRPr lang="en-US" sz="1200" dirty="0"/>
           </a:p>
@@ -3512,7 +3568,7 @@
                 <a:ea typeface="Arial" pitchFamily="34" charset="-122"/>
                 <a:cs typeface="Arial" pitchFamily="34" charset="-120"/>
               </a:rPr>
-              <a:t>Lição M7-F14, Não sei se é sonho, se realidade</a:t>
+              <a:t>Lição M7-F14, «Não sei se é sonho, se realidade»</a:t>
             </a:r>
             <a:endParaRPr lang="en-US" sz="1000" dirty="0"/>
           </a:p>
@@ -4135,7 +4191,7 @@
                 <a:ea typeface="Arial" pitchFamily="34" charset="-122"/>
                 <a:cs typeface="Arial" pitchFamily="34" charset="-120"/>
               </a:rPr>
-              <a:t>Lição M7-F14, Não sei se é sonho, se realidade</a:t>
+              <a:t>Lição M7-F14, «Não sei se é sonho, se realidade»</a:t>
             </a:r>
             <a:endParaRPr lang="en-US" sz="1000" dirty="0"/>
           </a:p>
@@ -5202,7 +5258,7 @@
                 <a:ea typeface="Arial" pitchFamily="34" charset="-122"/>
                 <a:cs typeface="Arial" pitchFamily="34" charset="-120"/>
               </a:rPr>
-              <a:t>Lição M7-F14, Não sei se é sonho, se realidade</a:t>
+              <a:t>Lição M7-F14, «Não sei se é sonho, se realidade»</a:t>
             </a:r>
             <a:endParaRPr lang="en-US" sz="1000" dirty="0"/>
           </a:p>
@@ -5915,7 +5971,7 @@
                 <a:ea typeface="Arial" pitchFamily="34" charset="-122"/>
                 <a:cs typeface="Arial" pitchFamily="34" charset="-120"/>
               </a:rPr>
-              <a:t>Lição M7-F14, Não sei se é sonho, se realidade</a:t>
+              <a:t>Lição M7-F14, «Não sei se é sonho, se realidade»</a:t>
             </a:r>
             <a:endParaRPr lang="en-US" sz="1000" dirty="0"/>
           </a:p>
@@ -6628,7 +6684,7 @@
                 <a:ea typeface="Arial" pitchFamily="34" charset="-122"/>
                 <a:cs typeface="Arial" pitchFamily="34" charset="-120"/>
               </a:rPr>
-              <a:t>Lição M7-F14, Não sei se é sonho, se realidade</a:t>
+              <a:t>Lição M7-F14, «Não sei se é sonho, se realidade»</a:t>
             </a:r>
             <a:endParaRPr lang="en-US" sz="1000" dirty="0"/>
           </a:p>
